--- a/slides/wanlai-elem-sdg16-peace/wanlai-elem-sdg16-peace.pptx
+++ b/slides/wanlai-elem-sdg16-peace/wanlai-elem-sdg16-peace.pptx
@@ -31,6 +31,7 @@
     <p:sldId id="279" r:id="rId30"/>
     <p:sldId id="280" r:id="rId31"/>
     <p:sldId id="281" r:id="rId32"/>
+    <p:sldId id="282" r:id="rId33"/>
   </p:sldIdLst>
   <p:sldSz cx="12191695" cy="6858000" type="screen4x3"/>
   <p:notesSz cx="6858000" cy="9144000"/>
@@ -3661,7 +3662,9 @@
       <p:grpSpPr/>
       <p:pic>
         <p:nvPicPr>
-          <p:cNvPr id="2" name="Picture 1" descr="020.png"/>
+          <p:cNvPr id="2" name="Picture 1" descr="020.jpg">
+            <a:hlinkClick r:id="rId3"/>
+          </p:cNvPr>
           <p:cNvPicPr>
             <a:picLocks noChangeAspect="1"/>
           </p:cNvPicPr>
@@ -3872,6 +3875,48 @@
       <p:pic>
         <p:nvPicPr>
           <p:cNvPr id="2" name="Picture 1" descr="025.png"/>
+          <p:cNvPicPr>
+            <a:picLocks noChangeAspect="1"/>
+          </p:cNvPicPr>
+          <p:nvPr/>
+        </p:nvPicPr>
+        <p:blipFill>
+          <a:blip r:embed="rId2"/>
+          <a:stretch>
+            <a:fillRect/>
+          </a:stretch>
+        </p:blipFill>
+        <p:spPr>
+          <a:xfrm>
+            <a:off x="0" y="0"/>
+            <a:ext cx="12191695" cy="6858000"/>
+          </a:xfrm>
+          <a:prstGeom prst="rect">
+            <a:avLst/>
+          </a:prstGeom>
+        </p:spPr>
+      </p:pic>
+    </p:spTree>
+  </p:cSld>
+  <p:clrMapOvr>
+    <a:masterClrMapping/>
+  </p:clrMapOvr>
+</p:sld>
+</file>
+
+<file path=ppt/slides/slide27.xml><?xml version="1.0" encoding="utf-8"?>
+<p:sld xmlns:a="http://schemas.openxmlformats.org/drawingml/2006/main" xmlns:p="http://schemas.openxmlformats.org/presentationml/2006/main" xmlns:r="http://schemas.openxmlformats.org/officeDocument/2006/relationships">
+  <p:cSld>
+    <p:spTree>
+      <p:nvGrpSpPr>
+        <p:cNvPr id="1" name=""/>
+        <p:cNvGrpSpPr/>
+        <p:nvPr/>
+      </p:nvGrpSpPr>
+      <p:grpSpPr/>
+      <p:pic>
+        <p:nvPicPr>
+          <p:cNvPr id="2" name="Picture 1" descr="026.png"/>
           <p:cNvPicPr>
             <a:picLocks noChangeAspect="1"/>
           </p:cNvPicPr>

--- a/slides/wanlai-elem-sdg16-peace/wanlai-elem-sdg16-peace.pptx
+++ b/slides/wanlai-elem-sdg16-peace/wanlai-elem-sdg16-peace.pptx
@@ -32,6 +32,10 @@
     <p:sldId id="280" r:id="rId31"/>
     <p:sldId id="281" r:id="rId32"/>
     <p:sldId id="282" r:id="rId33"/>
+    <p:sldId id="283" r:id="rId34"/>
+    <p:sldId id="284" r:id="rId35"/>
+    <p:sldId id="285" r:id="rId36"/>
+    <p:sldId id="286" r:id="rId37"/>
   </p:sldIdLst>
   <p:sldSz cx="12191695" cy="6858000" type="screen4x3"/>
   <p:notesSz cx="6858000" cy="9144000"/>
@@ -3242,7 +3246,7 @@
       <p:grpSpPr/>
       <p:pic>
         <p:nvPicPr>
-          <p:cNvPr id="2" name="Picture 1" descr="011.jpg"/>
+          <p:cNvPr id="2" name="Picture 1" descr="011.png"/>
           <p:cNvPicPr>
             <a:picLocks noChangeAspect="1"/>
           </p:cNvPicPr>
@@ -3326,7 +3330,7 @@
       <p:grpSpPr/>
       <p:pic>
         <p:nvPicPr>
-          <p:cNvPr id="2" name="Picture 1" descr="013.png"/>
+          <p:cNvPr id="2" name="Picture 1" descr="013.jpg"/>
           <p:cNvPicPr>
             <a:picLocks noChangeAspect="1"/>
           </p:cNvPicPr>
@@ -3368,7 +3372,7 @@
       <p:grpSpPr/>
       <p:pic>
         <p:nvPicPr>
-          <p:cNvPr id="2" name="Picture 1" descr="014.jpg"/>
+          <p:cNvPr id="2" name="Picture 1" descr="014.png"/>
           <p:cNvPicPr>
             <a:picLocks noChangeAspect="1"/>
           </p:cNvPicPr>
@@ -3410,7 +3414,7 @@
       <p:grpSpPr/>
       <p:pic>
         <p:nvPicPr>
-          <p:cNvPr id="2" name="Picture 1" descr="015.jpg"/>
+          <p:cNvPr id="2" name="Picture 1" descr="015.png"/>
           <p:cNvPicPr>
             <a:picLocks noChangeAspect="1"/>
           </p:cNvPicPr>
@@ -3536,7 +3540,7 @@
       <p:grpSpPr/>
       <p:pic>
         <p:nvPicPr>
-          <p:cNvPr id="2" name="Picture 1" descr="018.png"/>
+          <p:cNvPr id="2" name="Picture 1" descr="018.jpg"/>
           <p:cNvPicPr>
             <a:picLocks noChangeAspect="1"/>
           </p:cNvPicPr>
@@ -3620,7 +3624,7 @@
       <p:grpSpPr/>
       <p:pic>
         <p:nvPicPr>
-          <p:cNvPr id="2" name="Picture 1" descr="019.png"/>
+          <p:cNvPr id="2" name="Picture 1" descr="019.jpg"/>
           <p:cNvPicPr>
             <a:picLocks noChangeAspect="1"/>
           </p:cNvPicPr>
@@ -3662,9 +3666,7 @@
       <p:grpSpPr/>
       <p:pic>
         <p:nvPicPr>
-          <p:cNvPr id="2" name="Picture 1" descr="020.jpg">
-            <a:hlinkClick r:id="rId3"/>
-          </p:cNvPr>
+          <p:cNvPr id="2" name="Picture 1" descr="020.png"/>
           <p:cNvPicPr>
             <a:picLocks noChangeAspect="1"/>
           </p:cNvPicPr>
@@ -3832,7 +3834,9 @@
       <p:grpSpPr/>
       <p:pic>
         <p:nvPicPr>
-          <p:cNvPr id="2" name="Picture 1" descr="024.png"/>
+          <p:cNvPr id="2" name="Picture 1" descr="024.png">
+            <a:hlinkClick r:id="rId3"/>
+          </p:cNvPr>
           <p:cNvPicPr>
             <a:picLocks noChangeAspect="1"/>
           </p:cNvPicPr>
@@ -3946,6 +3950,90 @@
 </p:sld>
 </file>
 
+<file path=ppt/slides/slide28.xml><?xml version="1.0" encoding="utf-8"?>
+<p:sld xmlns:a="http://schemas.openxmlformats.org/drawingml/2006/main" xmlns:p="http://schemas.openxmlformats.org/presentationml/2006/main" xmlns:r="http://schemas.openxmlformats.org/officeDocument/2006/relationships">
+  <p:cSld>
+    <p:spTree>
+      <p:nvGrpSpPr>
+        <p:cNvPr id="1" name=""/>
+        <p:cNvGrpSpPr/>
+        <p:nvPr/>
+      </p:nvGrpSpPr>
+      <p:grpSpPr/>
+      <p:pic>
+        <p:nvPicPr>
+          <p:cNvPr id="2" name="Picture 1" descr="027.png"/>
+          <p:cNvPicPr>
+            <a:picLocks noChangeAspect="1"/>
+          </p:cNvPicPr>
+          <p:nvPr/>
+        </p:nvPicPr>
+        <p:blipFill>
+          <a:blip r:embed="rId2"/>
+          <a:stretch>
+            <a:fillRect/>
+          </a:stretch>
+        </p:blipFill>
+        <p:spPr>
+          <a:xfrm>
+            <a:off x="0" y="0"/>
+            <a:ext cx="12191695" cy="6858000"/>
+          </a:xfrm>
+          <a:prstGeom prst="rect">
+            <a:avLst/>
+          </a:prstGeom>
+        </p:spPr>
+      </p:pic>
+    </p:spTree>
+  </p:cSld>
+  <p:clrMapOvr>
+    <a:masterClrMapping/>
+  </p:clrMapOvr>
+</p:sld>
+</file>
+
+<file path=ppt/slides/slide29.xml><?xml version="1.0" encoding="utf-8"?>
+<p:sld xmlns:a="http://schemas.openxmlformats.org/drawingml/2006/main" xmlns:p="http://schemas.openxmlformats.org/presentationml/2006/main" xmlns:r="http://schemas.openxmlformats.org/officeDocument/2006/relationships">
+  <p:cSld>
+    <p:spTree>
+      <p:nvGrpSpPr>
+        <p:cNvPr id="1" name=""/>
+        <p:cNvGrpSpPr/>
+        <p:nvPr/>
+      </p:nvGrpSpPr>
+      <p:grpSpPr/>
+      <p:pic>
+        <p:nvPicPr>
+          <p:cNvPr id="2" name="Picture 1" descr="028.png"/>
+          <p:cNvPicPr>
+            <a:picLocks noChangeAspect="1"/>
+          </p:cNvPicPr>
+          <p:nvPr/>
+        </p:nvPicPr>
+        <p:blipFill>
+          <a:blip r:embed="rId2"/>
+          <a:stretch>
+            <a:fillRect/>
+          </a:stretch>
+        </p:blipFill>
+        <p:spPr>
+          <a:xfrm>
+            <a:off x="0" y="0"/>
+            <a:ext cx="12191695" cy="6858000"/>
+          </a:xfrm>
+          <a:prstGeom prst="rect">
+            <a:avLst/>
+          </a:prstGeom>
+        </p:spPr>
+      </p:pic>
+    </p:spTree>
+  </p:cSld>
+  <p:clrMapOvr>
+    <a:masterClrMapping/>
+  </p:clrMapOvr>
+</p:sld>
+</file>
+
 <file path=ppt/slides/slide3.xml><?xml version="1.0" encoding="utf-8"?>
 <p:sld xmlns:a="http://schemas.openxmlformats.org/drawingml/2006/main" xmlns:p="http://schemas.openxmlformats.org/presentationml/2006/main" xmlns:r="http://schemas.openxmlformats.org/officeDocument/2006/relationships">
   <p:cSld>
@@ -3959,6 +4047,90 @@
       <p:pic>
         <p:nvPicPr>
           <p:cNvPr id="2" name="Picture 1" descr="002.png"/>
+          <p:cNvPicPr>
+            <a:picLocks noChangeAspect="1"/>
+          </p:cNvPicPr>
+          <p:nvPr/>
+        </p:nvPicPr>
+        <p:blipFill>
+          <a:blip r:embed="rId2"/>
+          <a:stretch>
+            <a:fillRect/>
+          </a:stretch>
+        </p:blipFill>
+        <p:spPr>
+          <a:xfrm>
+            <a:off x="0" y="0"/>
+            <a:ext cx="12191695" cy="6858000"/>
+          </a:xfrm>
+          <a:prstGeom prst="rect">
+            <a:avLst/>
+          </a:prstGeom>
+        </p:spPr>
+      </p:pic>
+    </p:spTree>
+  </p:cSld>
+  <p:clrMapOvr>
+    <a:masterClrMapping/>
+  </p:clrMapOvr>
+</p:sld>
+</file>
+
+<file path=ppt/slides/slide30.xml><?xml version="1.0" encoding="utf-8"?>
+<p:sld xmlns:a="http://schemas.openxmlformats.org/drawingml/2006/main" xmlns:p="http://schemas.openxmlformats.org/presentationml/2006/main" xmlns:r="http://schemas.openxmlformats.org/officeDocument/2006/relationships">
+  <p:cSld>
+    <p:spTree>
+      <p:nvGrpSpPr>
+        <p:cNvPr id="1" name=""/>
+        <p:cNvGrpSpPr/>
+        <p:nvPr/>
+      </p:nvGrpSpPr>
+      <p:grpSpPr/>
+      <p:pic>
+        <p:nvPicPr>
+          <p:cNvPr id="2" name="Picture 1" descr="029.png"/>
+          <p:cNvPicPr>
+            <a:picLocks noChangeAspect="1"/>
+          </p:cNvPicPr>
+          <p:nvPr/>
+        </p:nvPicPr>
+        <p:blipFill>
+          <a:blip r:embed="rId2"/>
+          <a:stretch>
+            <a:fillRect/>
+          </a:stretch>
+        </p:blipFill>
+        <p:spPr>
+          <a:xfrm>
+            <a:off x="0" y="0"/>
+            <a:ext cx="12191695" cy="6858000"/>
+          </a:xfrm>
+          <a:prstGeom prst="rect">
+            <a:avLst/>
+          </a:prstGeom>
+        </p:spPr>
+      </p:pic>
+    </p:spTree>
+  </p:cSld>
+  <p:clrMapOvr>
+    <a:masterClrMapping/>
+  </p:clrMapOvr>
+</p:sld>
+</file>
+
+<file path=ppt/slides/slide31.xml><?xml version="1.0" encoding="utf-8"?>
+<p:sld xmlns:a="http://schemas.openxmlformats.org/drawingml/2006/main" xmlns:p="http://schemas.openxmlformats.org/presentationml/2006/main" xmlns:r="http://schemas.openxmlformats.org/officeDocument/2006/relationships">
+  <p:cSld>
+    <p:spTree>
+      <p:nvGrpSpPr>
+        <p:cNvPr id="1" name=""/>
+        <p:cNvGrpSpPr/>
+        <p:nvPr/>
+      </p:nvGrpSpPr>
+      <p:grpSpPr/>
+      <p:pic>
+        <p:nvPicPr>
+          <p:cNvPr id="2" name="Picture 1" descr="030.png"/>
           <p:cNvPicPr>
             <a:picLocks noChangeAspect="1"/>
           </p:cNvPicPr>
